--- a/docs/pptx/carbo/ritu-carbo-adjcif-anemia3.pptx
+++ b/docs/pptx/carbo/ritu-carbo-adjcif-anemia3.pptx
@@ -2271,7 +2271,7 @@
           </p:nvSpPr>
           <p:spPr>
             <a:xfrm>
-              <a:off x="910695" y="5185909"/>
+              <a:off x="910695" y="5184645"/>
               <a:ext cx="7706515" cy="0"/>
             </a:xfrm>
             <a:custGeom>
@@ -2314,7 +2314,7 @@
           </p:nvSpPr>
           <p:spPr>
             <a:xfrm>
-              <a:off x="910695" y="4396884"/>
+              <a:off x="910695" y="4393092"/>
               <a:ext cx="7706515" cy="0"/>
             </a:xfrm>
             <a:custGeom>
@@ -2357,7 +2357,7 @@
           </p:nvSpPr>
           <p:spPr>
             <a:xfrm>
-              <a:off x="910695" y="3607859"/>
+              <a:off x="910695" y="3601538"/>
               <a:ext cx="7706515" cy="0"/>
             </a:xfrm>
             <a:custGeom>
@@ -2400,7 +2400,7 @@
           </p:nvSpPr>
           <p:spPr>
             <a:xfrm>
-              <a:off x="910695" y="2818833"/>
+              <a:off x="910695" y="2809985"/>
               <a:ext cx="7706515" cy="0"/>
             </a:xfrm>
             <a:custGeom>
@@ -2658,7 +2658,7 @@
           </p:nvSpPr>
           <p:spPr>
             <a:xfrm>
-              <a:off x="910695" y="4791396"/>
+              <a:off x="910695" y="4788868"/>
               <a:ext cx="7706515" cy="0"/>
             </a:xfrm>
             <a:custGeom>
@@ -2701,7 +2701,7 @@
           </p:nvSpPr>
           <p:spPr>
             <a:xfrm>
-              <a:off x="910695" y="4002371"/>
+              <a:off x="910695" y="3997315"/>
               <a:ext cx="7706515" cy="0"/>
             </a:xfrm>
             <a:custGeom>
@@ -2744,7 +2744,7 @@
           </p:nvSpPr>
           <p:spPr>
             <a:xfrm>
-              <a:off x="910695" y="3213346"/>
+              <a:off x="910695" y="3205762"/>
               <a:ext cx="7706515" cy="0"/>
             </a:xfrm>
             <a:custGeom>
@@ -2916,96 +2916,96 @@
           </p:nvSpPr>
           <p:spPr>
             <a:xfrm>
-              <a:off x="1260991" y="5346410"/>
-              <a:ext cx="7005923" cy="215718"/>
+              <a:off x="1260991" y="5339165"/>
+              <a:ext cx="7005923" cy="223007"/>
             </a:xfrm>
             <a:custGeom>
               <a:avLst/>
               <a:pathLst>
-                <a:path w="7005923" h="215718">
+                <a:path w="7005923" h="223007">
                   <a:moveTo>
-                    <a:pt x="0" y="215718"/>
+                    <a:pt x="0" y="223007"/>
                   </a:moveTo>
                   <a:lnTo>
-                    <a:pt x="93412" y="215718"/>
-                  </a:lnTo>
-                  <a:lnTo>
-                    <a:pt x="93412" y="200131"/>
-                  </a:lnTo>
-                  <a:lnTo>
-                    <a:pt x="186824" y="200131"/>
-                  </a:lnTo>
-                  <a:lnTo>
-                    <a:pt x="186824" y="188846"/>
-                  </a:lnTo>
-                  <a:lnTo>
-                    <a:pt x="373649" y="188846"/>
-                  </a:lnTo>
-                  <a:lnTo>
-                    <a:pt x="373649" y="173972"/>
-                  </a:lnTo>
-                  <a:lnTo>
-                    <a:pt x="1494596" y="173972"/>
-                  </a:lnTo>
-                  <a:lnTo>
-                    <a:pt x="1494596" y="162011"/>
-                  </a:lnTo>
-                  <a:lnTo>
-                    <a:pt x="1681421" y="162011"/>
-                  </a:lnTo>
-                  <a:lnTo>
-                    <a:pt x="1681421" y="151126"/>
-                  </a:lnTo>
-                  <a:lnTo>
-                    <a:pt x="3643080" y="151126"/>
-                  </a:lnTo>
-                  <a:lnTo>
-                    <a:pt x="3643080" y="137896"/>
-                  </a:lnTo>
-                  <a:lnTo>
-                    <a:pt x="3736492" y="137896"/>
-                  </a:lnTo>
-                  <a:lnTo>
-                    <a:pt x="3736492" y="123721"/>
-                  </a:lnTo>
-                  <a:lnTo>
-                    <a:pt x="3829904" y="123721"/>
-                  </a:lnTo>
-                  <a:lnTo>
-                    <a:pt x="3829904" y="97833"/>
-                  </a:lnTo>
-                  <a:lnTo>
-                    <a:pt x="4577203" y="97833"/>
-                  </a:lnTo>
-                  <a:lnTo>
-                    <a:pt x="4577203" y="85630"/>
-                  </a:lnTo>
-                  <a:lnTo>
-                    <a:pt x="5604738" y="85630"/>
-                  </a:lnTo>
-                  <a:lnTo>
-                    <a:pt x="5604738" y="74019"/>
-                  </a:lnTo>
-                  <a:lnTo>
-                    <a:pt x="6165212" y="74019"/>
-                  </a:lnTo>
-                  <a:lnTo>
-                    <a:pt x="6165212" y="62804"/>
-                  </a:lnTo>
-                  <a:lnTo>
-                    <a:pt x="6258624" y="62804"/>
-                  </a:lnTo>
-                  <a:lnTo>
-                    <a:pt x="6258624" y="50328"/>
-                  </a:lnTo>
-                  <a:lnTo>
-                    <a:pt x="6445449" y="50328"/>
-                  </a:lnTo>
-                  <a:lnTo>
-                    <a:pt x="6445449" y="25986"/>
-                  </a:lnTo>
-                  <a:lnTo>
-                    <a:pt x="7005923" y="25986"/>
+                    <a:pt x="93412" y="223007"/>
+                  </a:lnTo>
+                  <a:lnTo>
+                    <a:pt x="93412" y="207382"/>
+                  </a:lnTo>
+                  <a:lnTo>
+                    <a:pt x="186824" y="207382"/>
+                  </a:lnTo>
+                  <a:lnTo>
+                    <a:pt x="186824" y="196155"/>
+                  </a:lnTo>
+                  <a:lnTo>
+                    <a:pt x="373649" y="196155"/>
+                  </a:lnTo>
+                  <a:lnTo>
+                    <a:pt x="373649" y="181290"/>
+                  </a:lnTo>
+                  <a:lnTo>
+                    <a:pt x="1494596" y="181290"/>
+                  </a:lnTo>
+                  <a:lnTo>
+                    <a:pt x="1494596" y="169505"/>
+                  </a:lnTo>
+                  <a:lnTo>
+                    <a:pt x="1681421" y="169505"/>
+                  </a:lnTo>
+                  <a:lnTo>
+                    <a:pt x="1681421" y="158616"/>
+                  </a:lnTo>
+                  <a:lnTo>
+                    <a:pt x="3643080" y="158616"/>
+                  </a:lnTo>
+                  <a:lnTo>
+                    <a:pt x="3643080" y="144964"/>
+                  </a:lnTo>
+                  <a:lnTo>
+                    <a:pt x="3736492" y="144964"/>
+                  </a:lnTo>
+                  <a:lnTo>
+                    <a:pt x="3736492" y="130144"/>
+                  </a:lnTo>
+                  <a:lnTo>
+                    <a:pt x="3829904" y="130144"/>
+                  </a:lnTo>
+                  <a:lnTo>
+                    <a:pt x="3829904" y="102857"/>
+                  </a:lnTo>
+                  <a:lnTo>
+                    <a:pt x="4577203" y="102857"/>
+                  </a:lnTo>
+                  <a:lnTo>
+                    <a:pt x="4577203" y="89971"/>
+                  </a:lnTo>
+                  <a:lnTo>
+                    <a:pt x="5604738" y="89971"/>
+                  </a:lnTo>
+                  <a:lnTo>
+                    <a:pt x="5604738" y="77720"/>
+                  </a:lnTo>
+                  <a:lnTo>
+                    <a:pt x="6165212" y="77720"/>
+                  </a:lnTo>
+                  <a:lnTo>
+                    <a:pt x="6165212" y="65892"/>
+                  </a:lnTo>
+                  <a:lnTo>
+                    <a:pt x="6258624" y="65892"/>
+                  </a:lnTo>
+                  <a:lnTo>
+                    <a:pt x="6258624" y="52800"/>
+                  </a:lnTo>
+                  <a:lnTo>
+                    <a:pt x="6445449" y="52800"/>
+                  </a:lnTo>
+                  <a:lnTo>
+                    <a:pt x="6445449" y="27252"/>
+                  </a:lnTo>
+                  <a:lnTo>
+                    <a:pt x="7005923" y="27252"/>
                   </a:lnTo>
                   <a:lnTo>
                     <a:pt x="7005923" y="0"/>
@@ -3038,95 +3038,95 @@
           <p:spPr>
             <a:xfrm>
               <a:off x="1260991" y="2861938"/>
-              <a:ext cx="7005923" cy="2522227"/>
+              <a:ext cx="7005923" cy="2532787"/>
             </a:xfrm>
             <a:custGeom>
               <a:avLst/>
               <a:pathLst>
-                <a:path w="7005923" h="2522227">
+                <a:path w="7005923" h="2532787">
                   <a:moveTo>
-                    <a:pt x="0" y="2522227"/>
+                    <a:pt x="0" y="2532787"/>
                   </a:moveTo>
                   <a:lnTo>
-                    <a:pt x="93412" y="2522227"/>
-                  </a:lnTo>
-                  <a:lnTo>
-                    <a:pt x="93412" y="2402193"/>
-                  </a:lnTo>
-                  <a:lnTo>
-                    <a:pt x="186824" y="2402193"/>
-                  </a:lnTo>
-                  <a:lnTo>
-                    <a:pt x="186824" y="2295070"/>
-                  </a:lnTo>
-                  <a:lnTo>
-                    <a:pt x="373649" y="2295070"/>
-                  </a:lnTo>
-                  <a:lnTo>
-                    <a:pt x="373649" y="2116360"/>
-                  </a:lnTo>
-                  <a:lnTo>
-                    <a:pt x="1494596" y="2116360"/>
-                  </a:lnTo>
-                  <a:lnTo>
-                    <a:pt x="1494596" y="1937727"/>
-                  </a:lnTo>
-                  <a:lnTo>
-                    <a:pt x="1681421" y="1937727"/>
-                  </a:lnTo>
-                  <a:lnTo>
-                    <a:pt x="1681421" y="1757909"/>
-                  </a:lnTo>
-                  <a:lnTo>
-                    <a:pt x="3643080" y="1757909"/>
-                  </a:lnTo>
-                  <a:lnTo>
-                    <a:pt x="3643080" y="1538130"/>
-                  </a:lnTo>
-                  <a:lnTo>
-                    <a:pt x="3736492" y="1538130"/>
-                  </a:lnTo>
-                  <a:lnTo>
-                    <a:pt x="3736492" y="1314614"/>
-                  </a:lnTo>
-                  <a:lnTo>
-                    <a:pt x="3829904" y="1314614"/>
-                  </a:lnTo>
-                  <a:lnTo>
-                    <a:pt x="3829904" y="948354"/>
-                  </a:lnTo>
-                  <a:lnTo>
-                    <a:pt x="4577203" y="948354"/>
-                  </a:lnTo>
-                  <a:lnTo>
-                    <a:pt x="4577203" y="795453"/>
-                  </a:lnTo>
-                  <a:lnTo>
-                    <a:pt x="5604738" y="795453"/>
-                  </a:lnTo>
-                  <a:lnTo>
-                    <a:pt x="5604738" y="661334"/>
-                  </a:lnTo>
-                  <a:lnTo>
-                    <a:pt x="6165212" y="661334"/>
-                  </a:lnTo>
-                  <a:lnTo>
-                    <a:pt x="6165212" y="541455"/>
-                  </a:lnTo>
-                  <a:lnTo>
-                    <a:pt x="6258624" y="541455"/>
-                  </a:lnTo>
-                  <a:lnTo>
-                    <a:pt x="6258624" y="417988"/>
-                  </a:lnTo>
-                  <a:lnTo>
-                    <a:pt x="6445449" y="417988"/>
-                  </a:lnTo>
-                  <a:lnTo>
-                    <a:pt x="6445449" y="202041"/>
-                  </a:lnTo>
-                  <a:lnTo>
-                    <a:pt x="7005923" y="202041"/>
+                    <a:pt x="93412" y="2532787"/>
+                  </a:lnTo>
+                  <a:lnTo>
+                    <a:pt x="93412" y="2421176"/>
+                  </a:lnTo>
+                  <a:lnTo>
+                    <a:pt x="186824" y="2421176"/>
+                  </a:lnTo>
+                  <a:lnTo>
+                    <a:pt x="186824" y="2320402"/>
+                  </a:lnTo>
+                  <a:lnTo>
+                    <a:pt x="373649" y="2320402"/>
+                  </a:lnTo>
+                  <a:lnTo>
+                    <a:pt x="373649" y="2147759"/>
+                  </a:lnTo>
+                  <a:lnTo>
+                    <a:pt x="1494596" y="2147759"/>
+                  </a:lnTo>
+                  <a:lnTo>
+                    <a:pt x="1494596" y="1975063"/>
+                  </a:lnTo>
+                  <a:lnTo>
+                    <a:pt x="1681421" y="1975063"/>
+                  </a:lnTo>
+                  <a:lnTo>
+                    <a:pt x="1681421" y="1798356"/>
+                  </a:lnTo>
+                  <a:lnTo>
+                    <a:pt x="3643080" y="1798356"/>
+                  </a:lnTo>
+                  <a:lnTo>
+                    <a:pt x="3643080" y="1576659"/>
+                  </a:lnTo>
+                  <a:lnTo>
+                    <a:pt x="3736492" y="1576659"/>
+                  </a:lnTo>
+                  <a:lnTo>
+                    <a:pt x="3736492" y="1349285"/>
+                  </a:lnTo>
+                  <a:lnTo>
+                    <a:pt x="3829904" y="1349285"/>
+                  </a:lnTo>
+                  <a:lnTo>
+                    <a:pt x="3829904" y="974031"/>
+                  </a:lnTo>
+                  <a:lnTo>
+                    <a:pt x="4577203" y="974031"/>
+                  </a:lnTo>
+                  <a:lnTo>
+                    <a:pt x="4577203" y="816859"/>
+                  </a:lnTo>
+                  <a:lnTo>
+                    <a:pt x="5604738" y="816859"/>
+                  </a:lnTo>
+                  <a:lnTo>
+                    <a:pt x="5604738" y="678958"/>
+                  </a:lnTo>
+                  <a:lnTo>
+                    <a:pt x="6165212" y="678958"/>
+                  </a:lnTo>
+                  <a:lnTo>
+                    <a:pt x="6165212" y="555638"/>
+                  </a:lnTo>
+                  <a:lnTo>
+                    <a:pt x="6258624" y="555638"/>
+                  </a:lnTo>
+                  <a:lnTo>
+                    <a:pt x="6258624" y="429140"/>
+                  </a:lnTo>
+                  <a:lnTo>
+                    <a:pt x="6445449" y="429140"/>
+                  </a:lnTo>
+                  <a:lnTo>
+                    <a:pt x="6445449" y="207524"/>
+                  </a:lnTo>
+                  <a:lnTo>
+                    <a:pt x="7005923" y="207524"/>
                   </a:lnTo>
                   <a:lnTo>
                     <a:pt x="7005923" y="0"/>
@@ -3204,7 +3204,7 @@
           </p:nvSpPr>
           <p:spPr>
             <a:xfrm>
-              <a:off x="692708" y="4751346"/>
+              <a:off x="692708" y="4748818"/>
               <a:ext cx="155356" cy="80101"/>
             </a:xfrm>
             <a:prstGeom prst="rect">
@@ -3250,7 +3250,7 @@
           </p:nvSpPr>
           <p:spPr>
             <a:xfrm>
-              <a:off x="692708" y="3962320"/>
+              <a:off x="692708" y="3957264"/>
               <a:ext cx="155356" cy="80101"/>
             </a:xfrm>
             <a:prstGeom prst="rect">
@@ -3296,7 +3296,7 @@
           </p:nvSpPr>
           <p:spPr>
             <a:xfrm>
-              <a:off x="692708" y="3173295"/>
+              <a:off x="692708" y="3165711"/>
               <a:ext cx="155356" cy="80101"/>
             </a:xfrm>
             <a:prstGeom prst="rect">
@@ -3777,7 +3777,7 @@
                   <a:latin typeface="Helvetica"/>
                   <a:cs typeface="Helvetica"/>
                 </a:rPr>
-                <a:t>Discrep &gt;= +25 vs &lt;+25: subHR = 78.58 (95% CI 5.09-1213.81), p = 0.002</a:t>
+                <a:t>Discrep &gt;= +25 vs &lt;+25: subHR = 71.38 (95% CI 4.87-1046.24), p = 0.002</a:t>
               </a:r>
             </a:p>
           </p:txBody>
